--- a/experiments/Course-Embedded-System-II/Slides-AI-edition.pptx
+++ b/experiments/Course-Embedded-System-II/Slides-AI-edition.pptx
@@ -1313,7 +1313,7 @@
           <a:lstStyle/>
           <a:p>
             <a:r>
-              <a:t>A quick word on where I'm coming from: embedded software, a PhD and postdoc on formal modelling and analysis of embedded systems, and now formal methods at Prover.</a:t>
+              <a:t>A quick word on where I'm coming from: embedded software, a PhD and postdoc on formal modelling and analysis of embedded systems, and now formal methods at P.</a:t>
             </a:r>
           </a:p>
         </p:txBody>
@@ -6622,7 +6622,7 @@
                 </a:solidFill>
                 <a:latin typeface="Calibri"/>
               </a:rPr>
-              <a:t>rong.gu@prover.se</a:t>
+              <a:t>ronggufly@gmail.com</a:t>
             </a:r>
           </a:p>
           <a:p>
@@ -14198,7 +14198,7 @@
                 </a:solidFill>
                 <a:latin typeface="Calibri"/>
               </a:rPr>
-              <a:t>Rong Gu — Formal Methods Developer at Prover (2025 – now)</a:t>
+              <a:t>Rong Gu — Formal Methods Developer at P (2025 – now)</a:t>
             </a:r>
           </a:p>
           <a:p>
@@ -14353,7 +14353,7 @@
                 </a:solidFill>
                 <a:latin typeface="Calibri"/>
               </a:rPr>
-              <a:t>Contact:  rong.gu@prover.se</a:t>
+              <a:t>Contact:  ronggufly@gmail.com</a:t>
             </a:r>
           </a:p>
         </p:txBody>
